--- a/Presentation to Stakeholder/Library Data Solution.pptx
+++ b/Presentation to Stakeholder/Library Data Solution.pptx
@@ -8,9 +8,11 @@
     <p:sldId id="256" r:id="rId2"/>
     <p:sldId id="261" r:id="rId3"/>
     <p:sldId id="258" r:id="rId4"/>
-    <p:sldId id="259" r:id="rId5"/>
-    <p:sldId id="260" r:id="rId6"/>
-    <p:sldId id="257" r:id="rId7"/>
+    <p:sldId id="262" r:id="rId5"/>
+    <p:sldId id="263" r:id="rId6"/>
+    <p:sldId id="259" r:id="rId7"/>
+    <p:sldId id="260" r:id="rId8"/>
+    <p:sldId id="257" r:id="rId9"/>
   </p:sldIdLst>
   <p:sldSz cx="12192000" cy="6858000"/>
   <p:notesSz cx="6858000" cy="9144000"/>
@@ -13363,35 +13365,6 @@
       </p:grpSpPr>
       <p:sp>
         <p:nvSpPr>
-          <p:cNvPr id="2" name="Title 1">
-            <a:extLst>
-              <a:ext uri="{FF2B5EF4-FFF2-40B4-BE49-F238E27FC236}">
-                <a16:creationId xmlns:a16="http://schemas.microsoft.com/office/drawing/2014/main" id="{C1669D42-25F5-49DA-9AE4-6A113512277D}"/>
-              </a:ext>
-            </a:extLst>
-          </p:cNvPr>
-          <p:cNvSpPr>
-            <a:spLocks noGrp="1"/>
-          </p:cNvSpPr>
-          <p:nvPr>
-            <p:ph type="title"/>
-          </p:nvPr>
-        </p:nvSpPr>
-        <p:spPr/>
-        <p:txBody>
-          <a:bodyPr/>
-          <a:lstStyle/>
-          <a:p>
-            <a:r>
-              <a:rPr lang="en-US" dirty="0"/>
-              <a:t>Proposed Solution</a:t>
-            </a:r>
-            <a:endParaRPr lang="en-GB" dirty="0"/>
-          </a:p>
-        </p:txBody>
-      </p:sp>
-      <p:sp>
-        <p:nvSpPr>
           <p:cNvPr id="6" name="TextBox 5">
             <a:extLst>
               <a:ext uri="{FF2B5EF4-FFF2-40B4-BE49-F238E27FC236}">
@@ -13997,6 +13970,47 @@
           </a:p>
         </p:txBody>
       </p:sp>
+      <p:sp>
+        <p:nvSpPr>
+          <p:cNvPr id="37" name="Title 1">
+            <a:extLst>
+              <a:ext uri="{FF2B5EF4-FFF2-40B4-BE49-F238E27FC236}">
+                <a16:creationId xmlns:a16="http://schemas.microsoft.com/office/drawing/2014/main" id="{95C047CE-D8F9-414F-BFEA-1CC490D8E294}"/>
+              </a:ext>
+            </a:extLst>
+          </p:cNvPr>
+          <p:cNvSpPr>
+            <a:spLocks noGrp="1"/>
+          </p:cNvSpPr>
+          <p:nvPr>
+            <p:ph type="title"/>
+          </p:nvPr>
+        </p:nvSpPr>
+        <p:spPr>
+          <a:xfrm>
+            <a:off x="1154954" y="663388"/>
+            <a:ext cx="10535022" cy="1017244"/>
+          </a:xfrm>
+        </p:spPr>
+        <p:txBody>
+          <a:bodyPr/>
+          <a:lstStyle/>
+          <a:p>
+            <a:r>
+              <a:rPr lang="en-US" dirty="0"/>
+              <a:t>Proposed Solution </a:t>
+            </a:r>
+            <a:br>
+              <a:rPr lang="en-US" dirty="0"/>
+            </a:br>
+            <a:r>
+              <a:rPr lang="en-US" sz="2400" i="1" dirty="0"/>
+              <a:t>Process Flow in User Terms</a:t>
+            </a:r>
+            <a:endParaRPr lang="en-GB" i="1" dirty="0"/>
+          </a:p>
+        </p:txBody>
+      </p:sp>
     </p:spTree>
     <p:extLst>
       <p:ext uri="{BB962C8B-B14F-4D97-AF65-F5344CB8AC3E}">
@@ -14011,6 +14025,529 @@
 </file>
 
 <file path=ppt/slides/slide4.xml><?xml version="1.0" encoding="utf-8"?>
+<p:sld xmlns:a="http://schemas.openxmlformats.org/drawingml/2006/main" xmlns:r="http://schemas.openxmlformats.org/officeDocument/2006/relationships" xmlns:p="http://schemas.openxmlformats.org/presentationml/2006/main">
+  <p:cSld>
+    <p:spTree>
+      <p:nvGrpSpPr>
+        <p:cNvPr id="1" name=""/>
+        <p:cNvGrpSpPr/>
+        <p:nvPr/>
+      </p:nvGrpSpPr>
+      <p:grpSpPr>
+        <a:xfrm>
+          <a:off x="0" y="0"/>
+          <a:ext cx="0" cy="0"/>
+          <a:chOff x="0" y="0"/>
+          <a:chExt cx="0" cy="0"/>
+        </a:xfrm>
+      </p:grpSpPr>
+      <p:sp>
+        <p:nvSpPr>
+          <p:cNvPr id="5" name="Title 1">
+            <a:extLst>
+              <a:ext uri="{FF2B5EF4-FFF2-40B4-BE49-F238E27FC236}">
+                <a16:creationId xmlns:a16="http://schemas.microsoft.com/office/drawing/2014/main" id="{2ED054CA-22BD-434F-A7E2-9BE260B2C1E1}"/>
+              </a:ext>
+            </a:extLst>
+          </p:cNvPr>
+          <p:cNvSpPr txBox="1">
+            <a:spLocks/>
+          </p:cNvSpPr>
+          <p:nvPr/>
+        </p:nvSpPr>
+        <p:spPr bwMode="gray">
+          <a:xfrm>
+            <a:off x="1154954" y="663388"/>
+            <a:ext cx="10535022" cy="1017244"/>
+          </a:xfrm>
+          <a:prstGeom prst="rect">
+            <a:avLst/>
+          </a:prstGeom>
+        </p:spPr>
+        <p:txBody>
+          <a:bodyPr vert="horz" lIns="91440" tIns="45720" rIns="91440" bIns="45720" rtlCol="0" anchor="ctr">
+            <a:noAutofit/>
+          </a:bodyPr>
+          <a:lstStyle>
+            <a:lvl1pPr algn="l" defTabSz="457200" rtl="0" eaLnBrk="1" latinLnBrk="0" hangingPunct="1">
+              <a:spcBef>
+                <a:spcPct val="0"/>
+              </a:spcBef>
+              <a:buNone/>
+              <a:defRPr sz="3600" b="0" i="0" kern="1200">
+                <a:solidFill>
+                  <a:schemeClr val="bg2"/>
+                </a:solidFill>
+                <a:latin typeface="+mj-lt"/>
+                <a:ea typeface="+mj-ea"/>
+                <a:cs typeface="+mj-cs"/>
+              </a:defRPr>
+            </a:lvl1pPr>
+            <a:lvl2pPr eaLnBrk="1" hangingPunct="1">
+              <a:defRPr>
+                <a:solidFill>
+                  <a:schemeClr val="tx2"/>
+                </a:solidFill>
+              </a:defRPr>
+            </a:lvl2pPr>
+            <a:lvl3pPr eaLnBrk="1" hangingPunct="1">
+              <a:defRPr>
+                <a:solidFill>
+                  <a:schemeClr val="tx2"/>
+                </a:solidFill>
+              </a:defRPr>
+            </a:lvl3pPr>
+            <a:lvl4pPr eaLnBrk="1" hangingPunct="1">
+              <a:defRPr>
+                <a:solidFill>
+                  <a:schemeClr val="tx2"/>
+                </a:solidFill>
+              </a:defRPr>
+            </a:lvl4pPr>
+            <a:lvl5pPr eaLnBrk="1" hangingPunct="1">
+              <a:defRPr>
+                <a:solidFill>
+                  <a:schemeClr val="tx2"/>
+                </a:solidFill>
+              </a:defRPr>
+            </a:lvl5pPr>
+            <a:lvl6pPr eaLnBrk="1" hangingPunct="1">
+              <a:defRPr>
+                <a:solidFill>
+                  <a:schemeClr val="tx2"/>
+                </a:solidFill>
+              </a:defRPr>
+            </a:lvl6pPr>
+            <a:lvl7pPr eaLnBrk="1" hangingPunct="1">
+              <a:defRPr>
+                <a:solidFill>
+                  <a:schemeClr val="tx2"/>
+                </a:solidFill>
+              </a:defRPr>
+            </a:lvl7pPr>
+            <a:lvl8pPr eaLnBrk="1" hangingPunct="1">
+              <a:defRPr>
+                <a:solidFill>
+                  <a:schemeClr val="tx2"/>
+                </a:solidFill>
+              </a:defRPr>
+            </a:lvl8pPr>
+            <a:lvl9pPr eaLnBrk="1" hangingPunct="1">
+              <a:defRPr>
+                <a:solidFill>
+                  <a:schemeClr val="tx2"/>
+                </a:solidFill>
+              </a:defRPr>
+            </a:lvl9pPr>
+          </a:lstStyle>
+          <a:p>
+            <a:r>
+              <a:rPr lang="en-US" dirty="0"/>
+              <a:t>Proposed Solution </a:t>
+            </a:r>
+            <a:br>
+              <a:rPr lang="en-US" dirty="0"/>
+            </a:br>
+            <a:r>
+              <a:rPr lang="en-US" sz="2400" i="1" dirty="0"/>
+              <a:t>Example Power BI Report – General Monitoring</a:t>
+            </a:r>
+            <a:endParaRPr lang="en-GB" i="1" dirty="0"/>
+          </a:p>
+        </p:txBody>
+      </p:sp>
+      <p:pic>
+        <p:nvPicPr>
+          <p:cNvPr id="7" name="Picture 6">
+            <a:extLst>
+              <a:ext uri="{FF2B5EF4-FFF2-40B4-BE49-F238E27FC236}">
+                <a16:creationId xmlns:a16="http://schemas.microsoft.com/office/drawing/2014/main" id="{54DF6903-31A0-470D-8BDB-85E88D514453}"/>
+              </a:ext>
+            </a:extLst>
+          </p:cNvPr>
+          <p:cNvPicPr>
+            <a:picLocks noChangeAspect="1"/>
+          </p:cNvPicPr>
+          <p:nvPr/>
+        </p:nvPicPr>
+        <p:blipFill>
+          <a:blip r:embed="rId2"/>
+          <a:stretch>
+            <a:fillRect/>
+          </a:stretch>
+        </p:blipFill>
+        <p:spPr>
+          <a:xfrm>
+            <a:off x="1866533" y="1987272"/>
+            <a:ext cx="8458933" cy="4694327"/>
+          </a:xfrm>
+          <a:prstGeom prst="rect">
+            <a:avLst/>
+          </a:prstGeom>
+        </p:spPr>
+      </p:pic>
+    </p:spTree>
+    <p:extLst>
+      <p:ext uri="{BB962C8B-B14F-4D97-AF65-F5344CB8AC3E}">
+        <p14:creationId xmlns:p14="http://schemas.microsoft.com/office/powerpoint/2010/main" val="3502484940"/>
+      </p:ext>
+    </p:extLst>
+  </p:cSld>
+  <p:clrMapOvr>
+    <a:masterClrMapping/>
+  </p:clrMapOvr>
+</p:sld>
+</file>
+
+<file path=ppt/slides/slide5.xml><?xml version="1.0" encoding="utf-8"?>
+<p:sld xmlns:a="http://schemas.openxmlformats.org/drawingml/2006/main" xmlns:r="http://schemas.openxmlformats.org/officeDocument/2006/relationships" xmlns:p="http://schemas.openxmlformats.org/presentationml/2006/main">
+  <p:cSld>
+    <p:spTree>
+      <p:nvGrpSpPr>
+        <p:cNvPr id="1" name=""/>
+        <p:cNvGrpSpPr/>
+        <p:nvPr/>
+      </p:nvGrpSpPr>
+      <p:grpSpPr>
+        <a:xfrm>
+          <a:off x="0" y="0"/>
+          <a:ext cx="0" cy="0"/>
+          <a:chOff x="0" y="0"/>
+          <a:chExt cx="0" cy="0"/>
+        </a:xfrm>
+      </p:grpSpPr>
+      <p:sp>
+        <p:nvSpPr>
+          <p:cNvPr id="2" name="Title 1">
+            <a:extLst>
+              <a:ext uri="{FF2B5EF4-FFF2-40B4-BE49-F238E27FC236}">
+                <a16:creationId xmlns:a16="http://schemas.microsoft.com/office/drawing/2014/main" id="{D0DA5CED-7B36-4007-A341-2D8F95EBFCC6}"/>
+              </a:ext>
+            </a:extLst>
+          </p:cNvPr>
+          <p:cNvSpPr>
+            <a:spLocks noGrp="1"/>
+          </p:cNvSpPr>
+          <p:nvPr>
+            <p:ph type="title"/>
+          </p:nvPr>
+        </p:nvSpPr>
+        <p:spPr>
+          <a:xfrm>
+            <a:off x="1154954" y="663388"/>
+            <a:ext cx="10535022" cy="1017244"/>
+          </a:xfrm>
+        </p:spPr>
+        <p:txBody>
+          <a:bodyPr/>
+          <a:lstStyle/>
+          <a:p>
+            <a:r>
+              <a:rPr lang="en-US" dirty="0"/>
+              <a:t>Proposed Solution </a:t>
+            </a:r>
+            <a:br>
+              <a:rPr lang="en-US" dirty="0"/>
+            </a:br>
+            <a:r>
+              <a:rPr lang="en-US" sz="2400" i="1" dirty="0"/>
+              <a:t>Screenshots of Demo Build</a:t>
+            </a:r>
+            <a:endParaRPr lang="en-GB" i="1" dirty="0"/>
+          </a:p>
+        </p:txBody>
+      </p:sp>
+      <p:sp>
+        <p:nvSpPr>
+          <p:cNvPr id="3" name="Text Placeholder 2">
+            <a:extLst>
+              <a:ext uri="{FF2B5EF4-FFF2-40B4-BE49-F238E27FC236}">
+                <a16:creationId xmlns:a16="http://schemas.microsoft.com/office/drawing/2014/main" id="{8A47EBC8-1D0B-42D5-A9FD-CCA8BBEC6A7A}"/>
+              </a:ext>
+            </a:extLst>
+          </p:cNvPr>
+          <p:cNvSpPr>
+            <a:spLocks noGrp="1"/>
+          </p:cNvSpPr>
+          <p:nvPr>
+            <p:ph type="body" idx="1"/>
+          </p:nvPr>
+        </p:nvSpPr>
+        <p:spPr/>
+        <p:txBody>
+          <a:bodyPr/>
+          <a:lstStyle/>
+          <a:p>
+            <a:r>
+              <a:rPr lang="en-US" dirty="0"/>
+              <a:t>User Interface</a:t>
+            </a:r>
+            <a:endParaRPr lang="en-GB" dirty="0"/>
+          </a:p>
+        </p:txBody>
+      </p:sp>
+      <p:pic>
+        <p:nvPicPr>
+          <p:cNvPr id="13" name="Picture Placeholder 12">
+            <a:extLst>
+              <a:ext uri="{FF2B5EF4-FFF2-40B4-BE49-F238E27FC236}">
+                <a16:creationId xmlns:a16="http://schemas.microsoft.com/office/drawing/2014/main" id="{990BCF29-99B8-48B8-A8C3-CE5E27468946}"/>
+              </a:ext>
+            </a:extLst>
+          </p:cNvPr>
+          <p:cNvPicPr>
+            <a:picLocks noGrp="1" noChangeAspect="1"/>
+          </p:cNvPicPr>
+          <p:nvPr>
+            <p:ph type="pic" idx="15"/>
+          </p:nvPr>
+        </p:nvPicPr>
+        <p:blipFill rotWithShape="1">
+          <a:blip r:embed="rId2"/>
+          <a:srcRect b="37231"/>
+          <a:stretch/>
+        </p:blipFill>
+        <p:spPr>
+          <a:xfrm>
+            <a:off x="1154954" y="2525433"/>
+            <a:ext cx="3050438" cy="1669577"/>
+          </a:xfrm>
+          <a:prstGeom prst="rect">
+            <a:avLst/>
+          </a:prstGeom>
+        </p:spPr>
+      </p:pic>
+      <p:sp>
+        <p:nvSpPr>
+          <p:cNvPr id="5" name="Text Placeholder 4">
+            <a:extLst>
+              <a:ext uri="{FF2B5EF4-FFF2-40B4-BE49-F238E27FC236}">
+                <a16:creationId xmlns:a16="http://schemas.microsoft.com/office/drawing/2014/main" id="{EE68D47C-DB51-46D5-9753-AC776B9BD80B}"/>
+              </a:ext>
+            </a:extLst>
+          </p:cNvPr>
+          <p:cNvSpPr>
+            <a:spLocks noGrp="1"/>
+          </p:cNvSpPr>
+          <p:nvPr>
+            <p:ph type="body" sz="half" idx="18"/>
+          </p:nvPr>
+        </p:nvSpPr>
+        <p:spPr/>
+        <p:txBody>
+          <a:bodyPr>
+            <a:normAutofit/>
+          </a:bodyPr>
+          <a:lstStyle/>
+          <a:p>
+            <a:r>
+              <a:rPr lang="en-US" dirty="0"/>
+              <a:t>A web page hosted on a virtual machine. A user accesses via URL and uploads a csv data file.</a:t>
+            </a:r>
+            <a:endParaRPr lang="en-GB" dirty="0"/>
+          </a:p>
+        </p:txBody>
+      </p:sp>
+      <p:sp>
+        <p:nvSpPr>
+          <p:cNvPr id="6" name="Text Placeholder 5">
+            <a:extLst>
+              <a:ext uri="{FF2B5EF4-FFF2-40B4-BE49-F238E27FC236}">
+                <a16:creationId xmlns:a16="http://schemas.microsoft.com/office/drawing/2014/main" id="{1D962B7C-9D8D-4FBF-A017-53BDD3EF73D5}"/>
+              </a:ext>
+            </a:extLst>
+          </p:cNvPr>
+          <p:cNvSpPr>
+            <a:spLocks noGrp="1"/>
+          </p:cNvSpPr>
+          <p:nvPr>
+            <p:ph type="body" sz="quarter" idx="3"/>
+          </p:nvPr>
+        </p:nvSpPr>
+        <p:spPr/>
+        <p:txBody>
+          <a:bodyPr/>
+          <a:lstStyle/>
+          <a:p>
+            <a:r>
+              <a:rPr lang="en-US" dirty="0"/>
+              <a:t>Process Output</a:t>
+            </a:r>
+            <a:endParaRPr lang="en-GB" dirty="0"/>
+          </a:p>
+        </p:txBody>
+      </p:sp>
+      <p:sp>
+        <p:nvSpPr>
+          <p:cNvPr id="8" name="Text Placeholder 7">
+            <a:extLst>
+              <a:ext uri="{FF2B5EF4-FFF2-40B4-BE49-F238E27FC236}">
+                <a16:creationId xmlns:a16="http://schemas.microsoft.com/office/drawing/2014/main" id="{124931D9-D938-4146-9706-D759E50D5818}"/>
+              </a:ext>
+            </a:extLst>
+          </p:cNvPr>
+          <p:cNvSpPr>
+            <a:spLocks noGrp="1"/>
+          </p:cNvSpPr>
+          <p:nvPr>
+            <p:ph type="body" sz="half" idx="19"/>
+          </p:nvPr>
+        </p:nvSpPr>
+        <p:spPr/>
+        <p:txBody>
+          <a:bodyPr>
+            <a:normAutofit/>
+          </a:bodyPr>
+          <a:lstStyle/>
+          <a:p>
+            <a:r>
+              <a:rPr lang="en-US" dirty="0"/>
+              <a:t>An example of the output within the process terminal as it cleans &amp; saves the file using python</a:t>
+            </a:r>
+            <a:endParaRPr lang="en-GB" dirty="0"/>
+          </a:p>
+        </p:txBody>
+      </p:sp>
+      <p:sp>
+        <p:nvSpPr>
+          <p:cNvPr id="9" name="Text Placeholder 8">
+            <a:extLst>
+              <a:ext uri="{FF2B5EF4-FFF2-40B4-BE49-F238E27FC236}">
+                <a16:creationId xmlns:a16="http://schemas.microsoft.com/office/drawing/2014/main" id="{BF035B3D-2979-4561-B3F5-6BAC4EA3729A}"/>
+              </a:ext>
+            </a:extLst>
+          </p:cNvPr>
+          <p:cNvSpPr>
+            <a:spLocks noGrp="1"/>
+          </p:cNvSpPr>
+          <p:nvPr>
+            <p:ph type="body" sz="quarter" idx="13"/>
+          </p:nvPr>
+        </p:nvSpPr>
+        <p:spPr/>
+        <p:txBody>
+          <a:bodyPr/>
+          <a:lstStyle/>
+          <a:p>
+            <a:r>
+              <a:rPr lang="en-US" dirty="0"/>
+              <a:t>Output for User</a:t>
+            </a:r>
+            <a:endParaRPr lang="en-GB" dirty="0"/>
+          </a:p>
+        </p:txBody>
+      </p:sp>
+      <p:sp>
+        <p:nvSpPr>
+          <p:cNvPr id="11" name="Text Placeholder 10">
+            <a:extLst>
+              <a:ext uri="{FF2B5EF4-FFF2-40B4-BE49-F238E27FC236}">
+                <a16:creationId xmlns:a16="http://schemas.microsoft.com/office/drawing/2014/main" id="{8BB4CA9C-2B29-4EFD-97BB-D19E52E9C72C}"/>
+              </a:ext>
+            </a:extLst>
+          </p:cNvPr>
+          <p:cNvSpPr>
+            <a:spLocks noGrp="1"/>
+          </p:cNvSpPr>
+          <p:nvPr>
+            <p:ph type="body" sz="half" idx="20"/>
+          </p:nvPr>
+        </p:nvSpPr>
+        <p:spPr/>
+        <p:txBody>
+          <a:bodyPr>
+            <a:normAutofit/>
+          </a:bodyPr>
+          <a:lstStyle/>
+          <a:p>
+            <a:r>
+              <a:rPr lang="en-US" dirty="0"/>
+              <a:t>The output seen by the user after processing, presenting them with a cleaned csv file to download.</a:t>
+            </a:r>
+            <a:endParaRPr lang="en-GB" dirty="0"/>
+          </a:p>
+        </p:txBody>
+      </p:sp>
+      <p:pic>
+        <p:nvPicPr>
+          <p:cNvPr id="17" name="Picture 16">
+            <a:extLst>
+              <a:ext uri="{FF2B5EF4-FFF2-40B4-BE49-F238E27FC236}">
+                <a16:creationId xmlns:a16="http://schemas.microsoft.com/office/drawing/2014/main" id="{3B48305F-72B9-4CAC-B932-8B63B1D9A464}"/>
+              </a:ext>
+            </a:extLst>
+          </p:cNvPr>
+          <p:cNvPicPr>
+            <a:picLocks noChangeAspect="1"/>
+          </p:cNvPicPr>
+          <p:nvPr/>
+        </p:nvPicPr>
+        <p:blipFill>
+          <a:blip r:embed="rId3"/>
+          <a:stretch>
+            <a:fillRect/>
+          </a:stretch>
+        </p:blipFill>
+        <p:spPr>
+          <a:xfrm>
+            <a:off x="4658676" y="2525433"/>
+            <a:ext cx="2958823" cy="1858308"/>
+          </a:xfrm>
+          <a:prstGeom prst="rect">
+            <a:avLst/>
+          </a:prstGeom>
+        </p:spPr>
+      </p:pic>
+      <p:pic>
+        <p:nvPicPr>
+          <p:cNvPr id="18" name="Picture Placeholder 12">
+            <a:extLst>
+              <a:ext uri="{FF2B5EF4-FFF2-40B4-BE49-F238E27FC236}">
+                <a16:creationId xmlns:a16="http://schemas.microsoft.com/office/drawing/2014/main" id="{44F618D5-2222-438F-B9B1-E4D4071A4C4C}"/>
+              </a:ext>
+            </a:extLst>
+          </p:cNvPr>
+          <p:cNvPicPr>
+            <a:picLocks noChangeAspect="1"/>
+          </p:cNvPicPr>
+          <p:nvPr/>
+        </p:nvPicPr>
+        <p:blipFill rotWithShape="1">
+          <a:blip r:embed="rId2"/>
+          <a:srcRect t="30204" b="-1545"/>
+          <a:stretch/>
+        </p:blipFill>
+        <p:spPr>
+          <a:xfrm>
+            <a:off x="8070783" y="2525433"/>
+            <a:ext cx="2987303" cy="1858308"/>
+          </a:xfrm>
+          <a:prstGeom prst="rect">
+            <a:avLst/>
+          </a:prstGeom>
+          <a:effectLst>
+            <a:outerShdw blurRad="50800" dist="50800" dir="5400000" algn="tl" rotWithShape="0">
+              <a:srgbClr val="000000">
+                <a:alpha val="43000"/>
+              </a:srgbClr>
+            </a:outerShdw>
+          </a:effectLst>
+        </p:spPr>
+      </p:pic>
+    </p:spTree>
+    <p:extLst>
+      <p:ext uri="{BB962C8B-B14F-4D97-AF65-F5344CB8AC3E}">
+        <p14:creationId xmlns:p14="http://schemas.microsoft.com/office/powerpoint/2010/main" val="2483835039"/>
+      </p:ext>
+    </p:extLst>
+  </p:cSld>
+  <p:clrMapOvr>
+    <a:masterClrMapping/>
+  </p:clrMapOvr>
+</p:sld>
+</file>
+
+<file path=ppt/slides/slide6.xml><?xml version="1.0" encoding="utf-8"?>
 <p:sld xmlns:a="http://schemas.openxmlformats.org/drawingml/2006/main" xmlns:r="http://schemas.openxmlformats.org/officeDocument/2006/relationships" xmlns:p="http://schemas.openxmlformats.org/presentationml/2006/main">
   <p:cSld>
     <p:spTree>
@@ -14119,7 +14656,7 @@
 </p:sld>
 </file>
 
-<file path=ppt/slides/slide5.xml><?xml version="1.0" encoding="utf-8"?>
+<file path=ppt/slides/slide7.xml><?xml version="1.0" encoding="utf-8"?>
 <p:sld xmlns:a="http://schemas.openxmlformats.org/drawingml/2006/main" xmlns:r="http://schemas.openxmlformats.org/officeDocument/2006/relationships" xmlns:p="http://schemas.openxmlformats.org/presentationml/2006/main">
   <p:cSld>
     <p:spTree>
@@ -14410,7 +14947,7 @@
 </p:sld>
 </file>
 
-<file path=ppt/slides/slide6.xml><?xml version="1.0" encoding="utf-8"?>
+<file path=ppt/slides/slide8.xml><?xml version="1.0" encoding="utf-8"?>
 <p:sld xmlns:a="http://schemas.openxmlformats.org/drawingml/2006/main" xmlns:r="http://schemas.openxmlformats.org/officeDocument/2006/relationships" xmlns:p="http://schemas.openxmlformats.org/presentationml/2006/main">
   <p:cSld>
     <p:spTree>
